--- a/11_Canva/Import_PPTX/Story/ADIG_Social_Story_Default_Light.pptx
+++ b/11_Canva/Import_PPTX/Story/ADIG_Social_Story_Default_Light.pptx
@@ -1623,13 +1623,11 @@
             <a:avLst/>
           </a:prstGeom>
           <a:solidFill>
-            <a:srgbClr val="101820">
-              <a:alpha val="25000"/>
-            </a:srgbClr>
+            <a:srgbClr val="B6ADA5"/>
           </a:solidFill>
           <a:ln w="12700">
             <a:solidFill>
-              <a:srgbClr val="101820"/>
+              <a:srgbClr val="B6ADA5"/>
             </a:solidFill>
             <a:prstDash val="solid"/>
           </a:ln>
@@ -1900,7 +1898,7 @@
         <p:spPr>
           <a:xfrm>
             <a:off x="685800" y="14540865"/>
-            <a:ext cx="8915400" cy="228600"/>
+            <a:ext cx="8915400" cy="214313"/>
           </a:xfrm>
           <a:prstGeom prst="rect">
             <a:avLst/>
@@ -1919,7 +1917,7 @@
               <a:buNone/>
             </a:pPr>
             <a:r>
-              <a:rPr lang="en-US" altLang="en-US" sz="1200" spc="50" kern="0" dirty="0">
+              <a:rPr lang="en-US" altLang="en-US" sz="1125" dirty="0">
                 <a:solidFill>
                   <a:srgbClr val="101820">
                     <a:alpha val="60000"/>
@@ -1931,7 +1929,7 @@
               </a:rPr>
               <a:t>Al Deafah International Group  ·  Umrah  ·  Transportation  ·  Hotels  ·  Catering</a:t>
             </a:r>
-            <a:endParaRPr lang="en-US" sz="1200" dirty="0"/>
+            <a:endParaRPr lang="en-US" sz="1125" dirty="0"/>
           </a:p>
         </p:txBody>
       </p:sp>
@@ -2378,13 +2376,11 @@
             <a:avLst/>
           </a:prstGeom>
           <a:solidFill>
-            <a:srgbClr val="101820">
-              <a:alpha val="25000"/>
-            </a:srgbClr>
+            <a:srgbClr val="B6ADA5"/>
           </a:solidFill>
           <a:ln w="12700">
             <a:solidFill>
-              <a:srgbClr val="101820"/>
+              <a:srgbClr val="B6ADA5"/>
             </a:solidFill>
             <a:prstDash val="solid"/>
           </a:ln>
@@ -2655,7 +2651,7 @@
         <p:spPr>
           <a:xfrm>
             <a:off x="685800" y="14540865"/>
-            <a:ext cx="8915400" cy="228600"/>
+            <a:ext cx="8915400" cy="214313"/>
           </a:xfrm>
           <a:prstGeom prst="rect">
             <a:avLst/>
@@ -2674,7 +2670,7 @@
               <a:buNone/>
             </a:pPr>
             <a:r>
-              <a:rPr lang="en-US" altLang="en-US" sz="1200" spc="50" kern="0" dirty="0">
+              <a:rPr lang="en-US" altLang="en-US" sz="1125" dirty="0">
                 <a:solidFill>
                   <a:srgbClr val="101820">
                     <a:alpha val="60000"/>
@@ -2686,7 +2682,7 @@
               </a:rPr>
               <a:t>Al Deafah International Group  ·  Umrah  ·  Transportation  ·  Hotels  ·  Catering</a:t>
             </a:r>
-            <a:endParaRPr lang="en-US" sz="1200" dirty="0"/>
+            <a:endParaRPr lang="en-US" sz="1125" dirty="0"/>
           </a:p>
         </p:txBody>
       </p:sp>
@@ -2742,7 +2738,7 @@
       </p:sp>
       <p:pic>
         <p:nvPicPr>
-          <p:cNvPr id="3" name="Image 0" descr="photo_placeholder">    </p:cNvPr>
+          <p:cNvPr id="3" name="Image 0" descr="photo_1080x1150">    </p:cNvPr>
           <p:cNvPicPr>
             <a:picLocks noChangeAspect="1"/>
           </p:cNvPicPr>
@@ -2756,8 +2752,8 @@
         </p:blipFill>
         <p:spPr>
           <a:xfrm>
-            <a:off x="0" y="0"/>
-            <a:ext cx="10287000" cy="10953750"/>
+            <a:off x="-411480" y="-438150"/>
+            <a:ext cx="11109960" cy="11830050"/>
           </a:xfrm>
           <a:prstGeom prst="rect">
             <a:avLst/>
@@ -2766,7 +2762,7 @@
       </p:pic>
       <p:pic>
         <p:nvPicPr>
-          <p:cNvPr id="4" name="Image 1" descr="grad_black">    </p:cNvPr>
+          <p:cNvPr id="4" name="Image 1" descr="gradv_1080x748">    </p:cNvPr>
           <p:cNvPicPr>
             <a:picLocks noChangeAspect="1"/>
           </p:cNvPicPr>
@@ -2780,8 +2776,8 @@
         </p:blipFill>
         <p:spPr>
           <a:xfrm>
-            <a:off x="0" y="3833812"/>
-            <a:ext cx="10287000" cy="7119938"/>
+            <a:off x="-411480" y="3829050"/>
+            <a:ext cx="11109960" cy="7124700"/>
           </a:xfrm>
           <a:prstGeom prst="rect">
             <a:avLst/>
@@ -3088,13 +3084,11 @@
             <a:avLst/>
           </a:prstGeom>
           <a:solidFill>
-            <a:srgbClr val="101820">
-              <a:alpha val="25000"/>
-            </a:srgbClr>
+            <a:srgbClr val="B6ADA5"/>
           </a:solidFill>
           <a:ln w="12700">
             <a:solidFill>
-              <a:srgbClr val="101820"/>
+              <a:srgbClr val="B6ADA5"/>
             </a:solidFill>
             <a:prstDash val="solid"/>
           </a:ln>
@@ -3365,7 +3359,7 @@
         <p:spPr>
           <a:xfrm>
             <a:off x="685800" y="14540865"/>
-            <a:ext cx="8915400" cy="228600"/>
+            <a:ext cx="8915400" cy="214313"/>
           </a:xfrm>
           <a:prstGeom prst="rect">
             <a:avLst/>
@@ -3384,7 +3378,7 @@
               <a:buNone/>
             </a:pPr>
             <a:r>
-              <a:rPr lang="en-US" altLang="en-US" sz="1200" spc="50" kern="0" dirty="0">
+              <a:rPr lang="en-US" altLang="en-US" sz="1125" dirty="0">
                 <a:solidFill>
                   <a:srgbClr val="101820">
                     <a:alpha val="60000"/>
@@ -3396,7 +3390,7 @@
               </a:rPr>
               <a:t>Al Deafah International Group  ·  Umrah  ·  Transportation  ·  Hotels  ·  Catering</a:t>
             </a:r>
-            <a:endParaRPr lang="en-US" sz="1200" dirty="0"/>
+            <a:endParaRPr lang="en-US" sz="1125" dirty="0"/>
           </a:p>
         </p:txBody>
       </p:sp>
